--- a/Generatory i Iteratory.pptx
+++ b/Generatory i Iteratory.pptx
@@ -23,7 +23,9 @@
     <p:sldId id="278" r:id="rId17"/>
     <p:sldId id="280" r:id="rId18"/>
     <p:sldId id="257" r:id="rId19"/>
-    <p:sldId id="262" r:id="rId20"/>
+    <p:sldId id="282" r:id="rId20"/>
+    <p:sldId id="281" r:id="rId21"/>
+    <p:sldId id="262" r:id="rId22"/>
   </p:sldIdLst>
   <p:sldSz cx="12192000" cy="6858000"/>
   <p:notesSz cx="6858000" cy="9144000"/>
@@ -134,6 +136,7 @@
 <p1510:revInfo xmlns:a="http://schemas.openxmlformats.org/drawingml/2006/main" xmlns:r="http://schemas.openxmlformats.org/officeDocument/2006/relationships" xmlns:p1510="http://schemas.microsoft.com/office/powerpoint/2015/10/main">
   <p1510:revLst>
     <p1510:client id="{BC397A5D-2CE8-0676-56DF-EA9CE18C6EA7}" v="1531" dt="2026-03-28T17:14:22.652"/>
+    <p1510:client id="{F678D1BB-E81B-AFD1-CE0B-65F9C28A6CC5}" v="283" dt="2026-03-30T14:37:59.170"/>
   </p1510:revLst>
 </p1510:revInfo>
 </file>
@@ -267,7 +270,7 @@
           <a:p>
             <a:fld id="{F98AA868-8872-43E4-8C98-D34DABD1FD38}" type="datetimeFigureOut">
               <a:rPr lang="pl-PL" smtClean="0"/>
-              <a:t>28.03.2026</a:t>
+              <a:t>30.03.2026</a:t>
             </a:fld>
             <a:endParaRPr lang="pl-PL"/>
           </a:p>
@@ -435,7 +438,7 @@
           <a:p>
             <a:fld id="{F98AA868-8872-43E4-8C98-D34DABD1FD38}" type="datetimeFigureOut">
               <a:rPr lang="pl-PL" smtClean="0"/>
-              <a:t>28.03.2026</a:t>
+              <a:t>30.03.2026</a:t>
             </a:fld>
             <a:endParaRPr lang="pl-PL"/>
           </a:p>
@@ -613,7 +616,7 @@
           <a:p>
             <a:fld id="{F98AA868-8872-43E4-8C98-D34DABD1FD38}" type="datetimeFigureOut">
               <a:rPr lang="pl-PL" smtClean="0"/>
-              <a:t>28.03.2026</a:t>
+              <a:t>30.03.2026</a:t>
             </a:fld>
             <a:endParaRPr lang="pl-PL"/>
           </a:p>
@@ -781,7 +784,7 @@
           <a:p>
             <a:fld id="{F98AA868-8872-43E4-8C98-D34DABD1FD38}" type="datetimeFigureOut">
               <a:rPr lang="pl-PL" smtClean="0"/>
-              <a:t>28.03.2026</a:t>
+              <a:t>30.03.2026</a:t>
             </a:fld>
             <a:endParaRPr lang="pl-PL"/>
           </a:p>
@@ -1026,7 +1029,7 @@
           <a:p>
             <a:fld id="{F98AA868-8872-43E4-8C98-D34DABD1FD38}" type="datetimeFigureOut">
               <a:rPr lang="pl-PL" smtClean="0"/>
-              <a:t>28.03.2026</a:t>
+              <a:t>30.03.2026</a:t>
             </a:fld>
             <a:endParaRPr lang="pl-PL"/>
           </a:p>
@@ -1255,7 +1258,7 @@
           <a:p>
             <a:fld id="{F98AA868-8872-43E4-8C98-D34DABD1FD38}" type="datetimeFigureOut">
               <a:rPr lang="pl-PL" smtClean="0"/>
-              <a:t>28.03.2026</a:t>
+              <a:t>30.03.2026</a:t>
             </a:fld>
             <a:endParaRPr lang="pl-PL"/>
           </a:p>
@@ -1619,7 +1622,7 @@
           <a:p>
             <a:fld id="{F98AA868-8872-43E4-8C98-D34DABD1FD38}" type="datetimeFigureOut">
               <a:rPr lang="pl-PL" smtClean="0"/>
-              <a:t>28.03.2026</a:t>
+              <a:t>30.03.2026</a:t>
             </a:fld>
             <a:endParaRPr lang="pl-PL"/>
           </a:p>
@@ -1736,7 +1739,7 @@
           <a:p>
             <a:fld id="{F98AA868-8872-43E4-8C98-D34DABD1FD38}" type="datetimeFigureOut">
               <a:rPr lang="pl-PL" smtClean="0"/>
-              <a:t>28.03.2026</a:t>
+              <a:t>30.03.2026</a:t>
             </a:fld>
             <a:endParaRPr lang="pl-PL"/>
           </a:p>
@@ -1831,7 +1834,7 @@
           <a:p>
             <a:fld id="{F98AA868-8872-43E4-8C98-D34DABD1FD38}" type="datetimeFigureOut">
               <a:rPr lang="pl-PL" smtClean="0"/>
-              <a:t>28.03.2026</a:t>
+              <a:t>30.03.2026</a:t>
             </a:fld>
             <a:endParaRPr lang="pl-PL"/>
           </a:p>
@@ -2106,7 +2109,7 @@
           <a:p>
             <a:fld id="{F98AA868-8872-43E4-8C98-D34DABD1FD38}" type="datetimeFigureOut">
               <a:rPr lang="pl-PL" smtClean="0"/>
-              <a:t>28.03.2026</a:t>
+              <a:t>30.03.2026</a:t>
             </a:fld>
             <a:endParaRPr lang="pl-PL"/>
           </a:p>
@@ -2358,7 +2361,7 @@
           <a:p>
             <a:fld id="{F98AA868-8872-43E4-8C98-D34DABD1FD38}" type="datetimeFigureOut">
               <a:rPr lang="pl-PL" smtClean="0"/>
-              <a:t>28.03.2026</a:t>
+              <a:t>30.03.2026</a:t>
             </a:fld>
             <a:endParaRPr lang="pl-PL"/>
           </a:p>
@@ -2569,7 +2572,7 @@
           <a:p>
             <a:fld id="{F98AA868-8872-43E4-8C98-D34DABD1FD38}" type="datetimeFigureOut">
               <a:rPr lang="pl-PL" smtClean="0"/>
-              <a:t>28.03.2026</a:t>
+              <a:t>30.03.2026</a:t>
             </a:fld>
             <a:endParaRPr lang="pl-PL"/>
           </a:p>
@@ -9782,7 +9785,7 @@
         <p:cNvPr id="1" name="">
           <a:extLst>
             <a:ext uri="{FF2B5EF4-FFF2-40B4-BE49-F238E27FC236}">
-              <a16:creationId xmlns:a16="http://schemas.microsoft.com/office/drawing/2014/main" id="{D38CD710-E97C-77F6-B1FD-412E03600364}"/>
+              <a16:creationId xmlns:a16="http://schemas.microsoft.com/office/drawing/2014/main" id="{E52604EE-A6E1-E513-8107-614B3D3E8ECF}"/>
             </a:ext>
           </a:extLst>
         </p:cNvPr>
@@ -9802,7 +9805,7 @@
           <p:cNvPr id="8" name="Rectangle 7">
             <a:extLst>
               <a:ext uri="{FF2B5EF4-FFF2-40B4-BE49-F238E27FC236}">
-                <a16:creationId xmlns:a16="http://schemas.microsoft.com/office/drawing/2014/main" id="{B9362AFE-FBFA-4540-D25D-827D19075190}"/>
+                <a16:creationId xmlns:a16="http://schemas.microsoft.com/office/drawing/2014/main" id="{30F47A60-4565-8CCA-1191-C9158B2D5055}"/>
               </a:ext>
               <a:ext uri="{C183D7F6-B498-43B3-948B-1728B52AA6E4}">
                 <adec:decorative xmlns:adec="http://schemas.microsoft.com/office/drawing/2017/decorative" val="1"/>
@@ -9878,7 +9881,7 @@
           <p:cNvPr id="10" name="Rectangle 9">
             <a:extLst>
               <a:ext uri="{FF2B5EF4-FFF2-40B4-BE49-F238E27FC236}">
-                <a16:creationId xmlns:a16="http://schemas.microsoft.com/office/drawing/2014/main" id="{E09C52AC-BA57-79AA-CBDF-8C153CC1A3BF}"/>
+                <a16:creationId xmlns:a16="http://schemas.microsoft.com/office/drawing/2014/main" id="{EF9CBB8F-C512-5098-98AC-843664B199C5}"/>
               </a:ext>
               <a:ext uri="{C183D7F6-B498-43B3-948B-1728B52AA6E4}">
                 <adec:decorative xmlns:adec="http://schemas.microsoft.com/office/drawing/2017/decorative" val="1"/>
@@ -9951,7 +9954,7 @@
           <p:cNvPr id="12" name="Rectangle 11">
             <a:extLst>
               <a:ext uri="{FF2B5EF4-FFF2-40B4-BE49-F238E27FC236}">
-                <a16:creationId xmlns:a16="http://schemas.microsoft.com/office/drawing/2014/main" id="{B510B602-E619-5A39-B1D4-7B1CD2DA284C}"/>
+                <a16:creationId xmlns:a16="http://schemas.microsoft.com/office/drawing/2014/main" id="{0C69B559-C559-D9BB-B4C1-C8631B13B327}"/>
               </a:ext>
               <a:ext uri="{C183D7F6-B498-43B3-948B-1728B52AA6E4}">
                 <adec:decorative xmlns:adec="http://schemas.microsoft.com/office/drawing/2017/decorative" val="1"/>
@@ -10027,7 +10030,7 @@
           <p:cNvPr id="14" name="Rectangle 13">
             <a:extLst>
               <a:ext uri="{FF2B5EF4-FFF2-40B4-BE49-F238E27FC236}">
-                <a16:creationId xmlns:a16="http://schemas.microsoft.com/office/drawing/2014/main" id="{BA78A61F-C434-8107-74FD-054693256DA3}"/>
+                <a16:creationId xmlns:a16="http://schemas.microsoft.com/office/drawing/2014/main" id="{683746C8-A085-2ACF-7ACF-866FC8B283A1}"/>
               </a:ext>
               <a:ext uri="{C183D7F6-B498-43B3-948B-1728B52AA6E4}">
                 <adec:decorative xmlns:adec="http://schemas.microsoft.com/office/drawing/2017/decorative" val="1"/>
@@ -10102,7 +10105,7 @@
           <p:cNvPr id="16" name="Rectangle 15">
             <a:extLst>
               <a:ext uri="{FF2B5EF4-FFF2-40B4-BE49-F238E27FC236}">
-                <a16:creationId xmlns:a16="http://schemas.microsoft.com/office/drawing/2014/main" id="{933484D1-41BC-7AC9-286E-EEB745A42F81}"/>
+                <a16:creationId xmlns:a16="http://schemas.microsoft.com/office/drawing/2014/main" id="{FBE185FC-5C6F-0771-AD8C-7CE84403CEE9}"/>
               </a:ext>
               <a:ext uri="{C183D7F6-B498-43B3-948B-1728B52AA6E4}">
                 <adec:decorative xmlns:adec="http://schemas.microsoft.com/office/drawing/2017/decorative" val="1"/>
@@ -10178,7 +10181,7 @@
           <p:cNvPr id="2" name="Tytuł 1">
             <a:extLst>
               <a:ext uri="{FF2B5EF4-FFF2-40B4-BE49-F238E27FC236}">
-                <a16:creationId xmlns:a16="http://schemas.microsoft.com/office/drawing/2014/main" id="{50019646-DD9D-2C4F-A07A-4F2FDB72CEDC}"/>
+                <a16:creationId xmlns:a16="http://schemas.microsoft.com/office/drawing/2014/main" id="{C88A3693-FE4E-2488-5411-68649EF801AA}"/>
               </a:ext>
             </a:extLst>
           </p:cNvPr>
@@ -10207,17 +10210,18 @@
                   <a:srgbClr val="FFFFFF"/>
                 </a:solidFill>
               </a:rPr>
-              <a:t>Bibliografia</a:t>
+              <a:t>Kiedy używać iteratorów i generatorów</a:t>
             </a:r>
-          </a:p>
-        </p:txBody>
-      </p:sp>
-      <p:sp>
-        <p:nvSpPr>
-          <p:cNvPr id="3" name="Symbol zastępczy zawartości 2">
-            <a:extLst>
-              <a:ext uri="{FF2B5EF4-FFF2-40B4-BE49-F238E27FC236}">
-                <a16:creationId xmlns:a16="http://schemas.microsoft.com/office/drawing/2014/main" id="{43099CE8-0406-C87F-56DC-04DE4D25A9C9}"/>
+            <a:endParaRPr lang="pl-PL"/>
+          </a:p>
+        </p:txBody>
+      </p:sp>
+      <p:sp>
+        <p:nvSpPr>
+          <p:cNvPr id="5" name="Symbol zastępczy zawartości 4">
+            <a:extLst>
+              <a:ext uri="{FF2B5EF4-FFF2-40B4-BE49-F238E27FC236}">
+                <a16:creationId xmlns:a16="http://schemas.microsoft.com/office/drawing/2014/main" id="{15F0D6B0-FAB0-8A83-E260-B95734CB32EE}"/>
               </a:ext>
             </a:extLst>
           </p:cNvPr>
@@ -10230,79 +10234,55 @@
         </p:nvSpPr>
         <p:spPr>
           <a:xfrm>
-            <a:off x="1371599" y="2318197"/>
-            <a:ext cx="9724031" cy="3683358"/>
-          </a:xfrm>
-        </p:spPr>
-        <p:txBody>
-          <a:bodyPr anchor="ctr">
+            <a:off x="760046" y="1986817"/>
+            <a:ext cx="10515600" cy="4351338"/>
+          </a:xfrm>
+        </p:spPr>
+        <p:txBody>
+          <a:bodyPr vert="horz" lIns="91440" tIns="45720" rIns="91440" bIns="45720" rtlCol="0" anchor="t">
             <a:normAutofit/>
           </a:bodyPr>
           <a:lstStyle/>
           <a:p>
             <a:r>
-              <a:rPr lang="pl-PL" sz="2000" dirty="0">
-                <a:ea typeface="+mn-lt"/>
-                <a:cs typeface="+mn-lt"/>
-                <a:hlinkClick r:id="rId2"/>
-              </a:rPr>
-              <a:t>https://www.geeksforgeeks.org/python/iterators-in-python/</a:t>
+              <a:rPr lang="pl-PL"/>
+              <a:t>Przy pracy na ogromnych zbiorach danych</a:t>
             </a:r>
-            <a:endParaRPr lang="pl-PL" sz="2000">
-              <a:ea typeface="+mn-lt"/>
-              <a:cs typeface="+mn-lt"/>
-            </a:endParaRPr>
+            <a:endParaRPr lang="pl-PL" dirty="0"/>
           </a:p>
           <a:p>
             <a:r>
-              <a:rPr lang="pl-PL" sz="2000" dirty="0">
-                <a:ea typeface="+mn-lt"/>
-                <a:cs typeface="+mn-lt"/>
-              </a:rPr>
-              <a:t>https://docs.python.org/3.14/tutorial/classes.html#iterators</a:t>
+              <a:rPr lang="pl-PL"/>
+              <a:t>Do generowania nieskończonych ciągów danych</a:t>
             </a:r>
-            <a:endParaRPr lang="pl-PL" sz="2000" dirty="0"/>
+            <a:endParaRPr lang="pl-PL" dirty="0"/>
           </a:p>
           <a:p>
             <a:r>
-              <a:rPr lang="pl-PL" sz="2000"/>
-              <a:t>Real Python: Working With Python's Iterators, Iterables, and Iteration </a:t>
+              <a:rPr lang="pl-PL"/>
+              <a:t>Gdy nie potrzebujemy dostępu do wszystkich danych naraz</a:t>
             </a:r>
+            <a:endParaRPr lang="pl-PL" dirty="0"/>
+          </a:p>
+          <a:p>
             <a:r>
-              <a:rPr lang="pl-PL" sz="2000" dirty="0">
-                <a:hlinkClick r:id="rId3"/>
-              </a:rPr>
-              <a:t>https</a:t>
+              <a:rPr lang="pl-PL"/>
+              <a:t>Do tworzenia potoków danych</a:t>
             </a:r>
-            <a:r>
-              <a:rPr lang="pl-PL" sz="2000" dirty="0">
-                <a:ea typeface="+mn-lt"/>
-                <a:cs typeface="+mn-lt"/>
-                <a:hlinkClick r:id="rId3"/>
-              </a:rPr>
-              <a:t>://www.youtube.com/watch?v=DcCt0dA6q1Q</a:t>
-            </a:r>
-            <a:endParaRPr lang="en-US" sz="2000">
-              <a:ea typeface="+mn-lt"/>
-              <a:cs typeface="+mn-lt"/>
-            </a:endParaRPr>
-          </a:p>
-          <a:p>
-            <a:r>
-              <a:rPr lang="en-US" sz="2000" dirty="0"/>
-              <a:t>https://docs.python.org/3/library/itertools.html</a:t>
-            </a:r>
-            <a:br>
-              <a:rPr lang="en-US" sz="2000" dirty="0"/>
-            </a:br>
-            <a:endParaRPr lang="en-US" sz="2000" dirty="0"/>
+            <a:endParaRPr lang="pl-PL" dirty="0"/>
+          </a:p>
+          <a:p>
+            <a:endParaRPr lang="pl-PL" dirty="0"/>
+          </a:p>
+          <a:p>
+            <a:endParaRPr lang="pl-PL" dirty="0"/>
           </a:p>
         </p:txBody>
       </p:sp>
     </p:spTree>
     <p:extLst>
       <p:ext uri="{BB962C8B-B14F-4D97-AF65-F5344CB8AC3E}">
-        <p14:creationId xmlns:p14="http://schemas.microsoft.com/office/powerpoint/2010/main" val="4075901508"/>
+        <p14:creationId xmlns:p14="http://schemas.microsoft.com/office/powerpoint/2010/main" val="1057566769"/>
       </p:ext>
     </p:extLst>
   </p:cSld>
@@ -10810,6 +10790,1080 @@
     <p:extLst>
       <p:ext uri="{BB962C8B-B14F-4D97-AF65-F5344CB8AC3E}">
         <p14:creationId xmlns:p14="http://schemas.microsoft.com/office/powerpoint/2010/main" val="1191069461"/>
+      </p:ext>
+    </p:extLst>
+  </p:cSld>
+  <p:clrMapOvr>
+    <a:masterClrMapping/>
+  </p:clrMapOvr>
+</p:sld>
+</file>
+
+<file path=ppt/slides/slide20.xml><?xml version="1.0" encoding="utf-8"?>
+<p:sld xmlns:a="http://schemas.openxmlformats.org/drawingml/2006/main" xmlns:r="http://schemas.openxmlformats.org/officeDocument/2006/relationships" xmlns:p="http://schemas.openxmlformats.org/presentationml/2006/main">
+  <p:cSld>
+    <p:bg>
+      <p:bgPr>
+        <a:solidFill>
+          <a:schemeClr val="bg1"/>
+        </a:solidFill>
+        <a:effectLst/>
+      </p:bgPr>
+    </p:bg>
+    <p:spTree>
+      <p:nvGrpSpPr>
+        <p:cNvPr id="1" name="">
+          <a:extLst>
+            <a:ext uri="{FF2B5EF4-FFF2-40B4-BE49-F238E27FC236}">
+              <a16:creationId xmlns:a16="http://schemas.microsoft.com/office/drawing/2014/main" id="{5BD0DCC1-0FB1-1FDC-F3EE-0AF0544048F6}"/>
+            </a:ext>
+          </a:extLst>
+        </p:cNvPr>
+        <p:cNvGrpSpPr/>
+        <p:nvPr/>
+      </p:nvGrpSpPr>
+      <p:grpSpPr>
+        <a:xfrm>
+          <a:off x="0" y="0"/>
+          <a:ext cx="0" cy="0"/>
+          <a:chOff x="0" y="0"/>
+          <a:chExt cx="0" cy="0"/>
+        </a:xfrm>
+      </p:grpSpPr>
+      <p:sp useBgFill="1">
+        <p:nvSpPr>
+          <p:cNvPr id="8" name="Rectangle 7">
+            <a:extLst>
+              <a:ext uri="{FF2B5EF4-FFF2-40B4-BE49-F238E27FC236}">
+                <a16:creationId xmlns:a16="http://schemas.microsoft.com/office/drawing/2014/main" id="{FDD7DFE9-7947-7988-7E75-FE39AD6BAC13}"/>
+              </a:ext>
+              <a:ext uri="{C183D7F6-B498-43B3-948B-1728B52AA6E4}">
+                <adec:decorative xmlns:adec="http://schemas.microsoft.com/office/drawing/2017/decorative" val="1"/>
+              </a:ext>
+            </a:extLst>
+          </p:cNvPr>
+          <p:cNvSpPr>
+            <a:spLocks noGrp="1" noRot="1" noChangeAspect="1" noMove="1" noResize="1" noEditPoints="1" noAdjustHandles="1" noChangeArrowheads="1" noChangeShapeType="1" noTextEdit="1"/>
+          </p:cNvSpPr>
+          <p:nvPr>
+            <p:extLst>
+              <p:ext uri="{386F3935-93C4-4BCD-93E2-E3B085C9AB24}">
+                <p16:designElem xmlns:p16="http://schemas.microsoft.com/office/powerpoint/2015/main" val="1"/>
+              </p:ext>
+            </p:extLst>
+          </p:nvPr>
+        </p:nvSpPr>
+        <p:spPr>
+          <a:xfrm>
+            <a:off x="0" y="0"/>
+            <a:ext cx="12192000" cy="6858000"/>
+          </a:xfrm>
+          <a:prstGeom prst="rect">
+            <a:avLst/>
+          </a:prstGeom>
+          <a:ln w="12700" cap="flat" cmpd="sng" algn="ctr">
+            <a:noFill/>
+            <a:prstDash val="solid"/>
+            <a:miter lim="800000"/>
+          </a:ln>
+          <a:effectLst/>
+          <a:extLst>
+            <a:ext uri="{91240B29-F687-4F45-9708-019B960494DF}">
+              <a14:hiddenLine xmlns:a14="http://schemas.microsoft.com/office/drawing/2010/main" w="12700" cap="flat" cmpd="sng" algn="ctr">
+                <a:solidFill>
+                  <a:schemeClr val="accent1">
+                    <a:shade val="50000"/>
+                  </a:schemeClr>
+                </a:solidFill>
+                <a:prstDash val="solid"/>
+                <a:miter lim="800000"/>
+              </a14:hiddenLine>
+            </a:ext>
+          </a:extLst>
+        </p:spPr>
+        <p:style>
+          <a:lnRef idx="2">
+            <a:schemeClr val="accent1">
+              <a:shade val="50000"/>
+            </a:schemeClr>
+          </a:lnRef>
+          <a:fillRef idx="1">
+            <a:schemeClr val="accent1"/>
+          </a:fillRef>
+          <a:effectRef idx="0">
+            <a:schemeClr val="accent1"/>
+          </a:effectRef>
+          <a:fontRef idx="minor">
+            <a:schemeClr val="lt1"/>
+          </a:fontRef>
+        </p:style>
+        <p:txBody>
+          <a:bodyPr rtlCol="0" anchor="ctr"/>
+          <a:lstStyle/>
+          <a:p>
+            <a:pPr algn="ctr"/>
+            <a:endParaRPr lang="en-US"/>
+          </a:p>
+        </p:txBody>
+      </p:sp>
+      <p:sp>
+        <p:nvSpPr>
+          <p:cNvPr id="10" name="Rectangle 9">
+            <a:extLst>
+              <a:ext uri="{FF2B5EF4-FFF2-40B4-BE49-F238E27FC236}">
+                <a16:creationId xmlns:a16="http://schemas.microsoft.com/office/drawing/2014/main" id="{1A686574-5DE6-3613-BF92-5D7C3BD2A144}"/>
+              </a:ext>
+              <a:ext uri="{C183D7F6-B498-43B3-948B-1728B52AA6E4}">
+                <adec:decorative xmlns:adec="http://schemas.microsoft.com/office/drawing/2017/decorative" val="1"/>
+              </a:ext>
+            </a:extLst>
+          </p:cNvPr>
+          <p:cNvSpPr>
+            <a:spLocks noGrp="1" noRot="1" noChangeAspect="1" noMove="1" noResize="1" noEditPoints="1" noAdjustHandles="1" noChangeArrowheads="1" noChangeShapeType="1" noTextEdit="1"/>
+          </p:cNvSpPr>
+          <p:nvPr>
+            <p:extLst>
+              <p:ext uri="{386F3935-93C4-4BCD-93E2-E3B085C9AB24}">
+                <p16:designElem xmlns:p16="http://schemas.microsoft.com/office/powerpoint/2015/main" val="1"/>
+              </p:ext>
+            </p:extLst>
+          </p:nvPr>
+        </p:nvSpPr>
+        <p:spPr>
+          <a:xfrm flipH="1">
+            <a:off x="-1" y="-1"/>
+            <a:ext cx="12191998" cy="1590742"/>
+          </a:xfrm>
+          <a:prstGeom prst="rect">
+            <a:avLst/>
+          </a:prstGeom>
+          <a:gradFill>
+            <a:gsLst>
+              <a:gs pos="0">
+                <a:srgbClr val="000000"/>
+              </a:gs>
+              <a:gs pos="100000">
+                <a:schemeClr val="accent1">
+                  <a:lumMod val="75000"/>
+                </a:schemeClr>
+              </a:gs>
+            </a:gsLst>
+            <a:lin ang="8400000" scaled="0"/>
+          </a:gradFill>
+          <a:ln>
+            <a:noFill/>
+          </a:ln>
+        </p:spPr>
+        <p:style>
+          <a:lnRef idx="2">
+            <a:schemeClr val="accent1">
+              <a:shade val="50000"/>
+            </a:schemeClr>
+          </a:lnRef>
+          <a:fillRef idx="1">
+            <a:schemeClr val="accent1"/>
+          </a:fillRef>
+          <a:effectRef idx="0">
+            <a:schemeClr val="accent1"/>
+          </a:effectRef>
+          <a:fontRef idx="minor">
+            <a:schemeClr val="lt1"/>
+          </a:fontRef>
+        </p:style>
+        <p:txBody>
+          <a:bodyPr rtlCol="0" anchor="ctr"/>
+          <a:lstStyle/>
+          <a:p>
+            <a:pPr algn="ctr"/>
+            <a:endParaRPr lang="en-US"/>
+          </a:p>
+        </p:txBody>
+      </p:sp>
+      <p:sp>
+        <p:nvSpPr>
+          <p:cNvPr id="12" name="Rectangle 11">
+            <a:extLst>
+              <a:ext uri="{FF2B5EF4-FFF2-40B4-BE49-F238E27FC236}">
+                <a16:creationId xmlns:a16="http://schemas.microsoft.com/office/drawing/2014/main" id="{3C7A83C6-B1FB-D1C2-E54E-95BB52F5660B}"/>
+              </a:ext>
+              <a:ext uri="{C183D7F6-B498-43B3-948B-1728B52AA6E4}">
+                <adec:decorative xmlns:adec="http://schemas.microsoft.com/office/drawing/2017/decorative" val="1"/>
+              </a:ext>
+            </a:extLst>
+          </p:cNvPr>
+          <p:cNvSpPr>
+            <a:spLocks noGrp="1" noRot="1" noChangeAspect="1" noMove="1" noResize="1" noEditPoints="1" noAdjustHandles="1" noChangeArrowheads="1" noChangeShapeType="1" noTextEdit="1"/>
+          </p:cNvSpPr>
+          <p:nvPr>
+            <p:extLst>
+              <p:ext uri="{386F3935-93C4-4BCD-93E2-E3B085C9AB24}">
+                <p16:designElem xmlns:p16="http://schemas.microsoft.com/office/powerpoint/2015/main" val="1"/>
+              </p:ext>
+            </p:extLst>
+          </p:nvPr>
+        </p:nvSpPr>
+        <p:spPr>
+          <a:xfrm rot="10800000" flipH="1">
+            <a:off x="-3" y="0"/>
+            <a:ext cx="8115306" cy="1590742"/>
+          </a:xfrm>
+          <a:prstGeom prst="rect">
+            <a:avLst/>
+          </a:prstGeom>
+          <a:gradFill>
+            <a:gsLst>
+              <a:gs pos="20000">
+                <a:schemeClr val="accent1">
+                  <a:alpha val="0"/>
+                </a:schemeClr>
+              </a:gs>
+              <a:gs pos="100000">
+                <a:schemeClr val="accent1">
+                  <a:lumMod val="50000"/>
+                  <a:alpha val="55000"/>
+                </a:schemeClr>
+              </a:gs>
+            </a:gsLst>
+            <a:lin ang="13800000" scaled="0"/>
+          </a:gradFill>
+          <a:ln>
+            <a:noFill/>
+          </a:ln>
+        </p:spPr>
+        <p:style>
+          <a:lnRef idx="2">
+            <a:schemeClr val="accent1">
+              <a:shade val="50000"/>
+            </a:schemeClr>
+          </a:lnRef>
+          <a:fillRef idx="1">
+            <a:schemeClr val="accent1"/>
+          </a:fillRef>
+          <a:effectRef idx="0">
+            <a:schemeClr val="accent1"/>
+          </a:effectRef>
+          <a:fontRef idx="minor">
+            <a:schemeClr val="lt1"/>
+          </a:fontRef>
+        </p:style>
+        <p:txBody>
+          <a:bodyPr rtlCol="0" anchor="ctr"/>
+          <a:lstStyle/>
+          <a:p>
+            <a:pPr algn="ctr"/>
+            <a:endParaRPr lang="en-US"/>
+          </a:p>
+        </p:txBody>
+      </p:sp>
+      <p:sp>
+        <p:nvSpPr>
+          <p:cNvPr id="14" name="Rectangle 13">
+            <a:extLst>
+              <a:ext uri="{FF2B5EF4-FFF2-40B4-BE49-F238E27FC236}">
+                <a16:creationId xmlns:a16="http://schemas.microsoft.com/office/drawing/2014/main" id="{213A345D-B6CA-2A6F-FC1C-9F72F7DE48E0}"/>
+              </a:ext>
+              <a:ext uri="{C183D7F6-B498-43B3-948B-1728B52AA6E4}">
+                <adec:decorative xmlns:adec="http://schemas.microsoft.com/office/drawing/2017/decorative" val="1"/>
+              </a:ext>
+            </a:extLst>
+          </p:cNvPr>
+          <p:cNvSpPr>
+            <a:spLocks noGrp="1" noRot="1" noChangeAspect="1" noMove="1" noResize="1" noEditPoints="1" noAdjustHandles="1" noChangeArrowheads="1" noChangeShapeType="1" noTextEdit="1"/>
+          </p:cNvSpPr>
+          <p:nvPr>
+            <p:extLst>
+              <p:ext uri="{386F3935-93C4-4BCD-93E2-E3B085C9AB24}">
+                <p16:designElem xmlns:p16="http://schemas.microsoft.com/office/powerpoint/2015/main" val="1"/>
+              </p:ext>
+            </p:extLst>
+          </p:nvPr>
+        </p:nvSpPr>
+        <p:spPr>
+          <a:xfrm flipH="1">
+            <a:off x="8115299" y="-1"/>
+            <a:ext cx="4076698" cy="1590742"/>
+          </a:xfrm>
+          <a:prstGeom prst="rect">
+            <a:avLst/>
+          </a:prstGeom>
+          <a:gradFill>
+            <a:gsLst>
+              <a:gs pos="0">
+                <a:schemeClr val="accent1">
+                  <a:alpha val="66000"/>
+                </a:schemeClr>
+              </a:gs>
+              <a:gs pos="100000">
+                <a:srgbClr val="000000">
+                  <a:alpha val="30000"/>
+                </a:srgbClr>
+              </a:gs>
+            </a:gsLst>
+            <a:lin ang="13200000" scaled="0"/>
+          </a:gradFill>
+          <a:ln>
+            <a:noFill/>
+          </a:ln>
+        </p:spPr>
+        <p:style>
+          <a:lnRef idx="2">
+            <a:schemeClr val="accent1">
+              <a:shade val="50000"/>
+            </a:schemeClr>
+          </a:lnRef>
+          <a:fillRef idx="1">
+            <a:schemeClr val="accent1"/>
+          </a:fillRef>
+          <a:effectRef idx="0">
+            <a:schemeClr val="accent1"/>
+          </a:effectRef>
+          <a:fontRef idx="minor">
+            <a:schemeClr val="lt1"/>
+          </a:fontRef>
+        </p:style>
+        <p:txBody>
+          <a:bodyPr rtlCol="0" anchor="ctr"/>
+          <a:lstStyle/>
+          <a:p>
+            <a:pPr algn="ctr"/>
+            <a:endParaRPr lang="en-US"/>
+          </a:p>
+        </p:txBody>
+      </p:sp>
+      <p:sp>
+        <p:nvSpPr>
+          <p:cNvPr id="16" name="Rectangle 15">
+            <a:extLst>
+              <a:ext uri="{FF2B5EF4-FFF2-40B4-BE49-F238E27FC236}">
+                <a16:creationId xmlns:a16="http://schemas.microsoft.com/office/drawing/2014/main" id="{5E7634DF-9E76-C165-665F-C7F8F30AC66D}"/>
+              </a:ext>
+              <a:ext uri="{C183D7F6-B498-43B3-948B-1728B52AA6E4}">
+                <adec:decorative xmlns:adec="http://schemas.microsoft.com/office/drawing/2017/decorative" val="1"/>
+              </a:ext>
+            </a:extLst>
+          </p:cNvPr>
+          <p:cNvSpPr>
+            <a:spLocks noGrp="1" noRot="1" noChangeAspect="1" noMove="1" noResize="1" noEditPoints="1" noAdjustHandles="1" noChangeArrowheads="1" noChangeShapeType="1" noTextEdit="1"/>
+          </p:cNvSpPr>
+          <p:nvPr>
+            <p:extLst>
+              <p:ext uri="{386F3935-93C4-4BCD-93E2-E3B085C9AB24}">
+                <p16:designElem xmlns:p16="http://schemas.microsoft.com/office/powerpoint/2015/main" val="1"/>
+              </p:ext>
+            </p:extLst>
+          </p:nvPr>
+        </p:nvSpPr>
+        <p:spPr>
+          <a:xfrm>
+            <a:off x="459350" y="-1"/>
+            <a:ext cx="11732646" cy="1597433"/>
+          </a:xfrm>
+          <a:prstGeom prst="rect">
+            <a:avLst/>
+          </a:prstGeom>
+          <a:gradFill>
+            <a:gsLst>
+              <a:gs pos="50000">
+                <a:srgbClr val="000000">
+                  <a:alpha val="0"/>
+                </a:srgbClr>
+              </a:gs>
+              <a:gs pos="99000">
+                <a:schemeClr val="accent1">
+                  <a:lumMod val="50000"/>
+                  <a:alpha val="52000"/>
+                </a:schemeClr>
+              </a:gs>
+            </a:gsLst>
+            <a:lin ang="16800000" scaled="0"/>
+          </a:gradFill>
+          <a:ln>
+            <a:noFill/>
+          </a:ln>
+        </p:spPr>
+        <p:style>
+          <a:lnRef idx="2">
+            <a:schemeClr val="accent1">
+              <a:shade val="50000"/>
+            </a:schemeClr>
+          </a:lnRef>
+          <a:fillRef idx="1">
+            <a:schemeClr val="accent1"/>
+          </a:fillRef>
+          <a:effectRef idx="0">
+            <a:schemeClr val="accent1"/>
+          </a:effectRef>
+          <a:fontRef idx="minor">
+            <a:schemeClr val="lt1"/>
+          </a:fontRef>
+        </p:style>
+        <p:txBody>
+          <a:bodyPr rtlCol="0" anchor="ctr"/>
+          <a:lstStyle/>
+          <a:p>
+            <a:pPr algn="ctr"/>
+            <a:endParaRPr lang="en-US"/>
+          </a:p>
+        </p:txBody>
+      </p:sp>
+      <p:sp>
+        <p:nvSpPr>
+          <p:cNvPr id="2" name="Tytuł 1">
+            <a:extLst>
+              <a:ext uri="{FF2B5EF4-FFF2-40B4-BE49-F238E27FC236}">
+                <a16:creationId xmlns:a16="http://schemas.microsoft.com/office/drawing/2014/main" id="{A0FAB327-D224-3E2E-B4A6-B206E9A55D02}"/>
+              </a:ext>
+            </a:extLst>
+          </p:cNvPr>
+          <p:cNvSpPr>
+            <a:spLocks noGrp="1"/>
+          </p:cNvSpPr>
+          <p:nvPr>
+            <p:ph type="title"/>
+          </p:nvPr>
+        </p:nvSpPr>
+        <p:spPr>
+          <a:xfrm>
+            <a:off x="1371599" y="294538"/>
+            <a:ext cx="9895951" cy="1033669"/>
+          </a:xfrm>
+        </p:spPr>
+        <p:txBody>
+          <a:bodyPr>
+            <a:normAutofit/>
+          </a:bodyPr>
+          <a:lstStyle/>
+          <a:p>
+            <a:r>
+              <a:rPr lang="pl-PL" sz="4000">
+                <a:solidFill>
+                  <a:srgbClr val="FFFFFF"/>
+                </a:solidFill>
+              </a:rPr>
+              <a:t>Czy listy są bez sensu? NIE!</a:t>
+            </a:r>
+            <a:endParaRPr lang="pl-PL" sz="4000" dirty="0">
+              <a:solidFill>
+                <a:srgbClr val="FFFFFF"/>
+              </a:solidFill>
+            </a:endParaRPr>
+          </a:p>
+        </p:txBody>
+      </p:sp>
+      <p:sp>
+        <p:nvSpPr>
+          <p:cNvPr id="5" name="Symbol zastępczy zawartości 4">
+            <a:extLst>
+              <a:ext uri="{FF2B5EF4-FFF2-40B4-BE49-F238E27FC236}">
+                <a16:creationId xmlns:a16="http://schemas.microsoft.com/office/drawing/2014/main" id="{39188AA7-66F1-2D92-60F7-160598BA9257}"/>
+              </a:ext>
+            </a:extLst>
+          </p:cNvPr>
+          <p:cNvSpPr>
+            <a:spLocks noGrp="1"/>
+          </p:cNvSpPr>
+          <p:nvPr>
+            <p:ph idx="1"/>
+          </p:nvPr>
+        </p:nvSpPr>
+        <p:spPr>
+          <a:xfrm>
+            <a:off x="760046" y="1923317"/>
+            <a:ext cx="10515600" cy="4351338"/>
+          </a:xfrm>
+        </p:spPr>
+        <p:txBody>
+          <a:bodyPr vert="horz" lIns="91440" tIns="45720" rIns="91440" bIns="45720" rtlCol="0" anchor="t">
+            <a:normAutofit/>
+          </a:bodyPr>
+          <a:lstStyle/>
+          <a:p>
+            <a:pPr marL="0" indent="0">
+              <a:buNone/>
+            </a:pPr>
+            <a:r>
+              <a:rPr lang="pl-PL" sz="3200" b="1"/>
+              <a:t>Kiedy używać list:</a:t>
+            </a:r>
+          </a:p>
+          <a:p>
+            <a:r>
+              <a:rPr lang="pl-PL" sz="2400"/>
+              <a:t>Gdy potrzebujemy dostępu do konkretnego elementu np. liczby[4]</a:t>
+            </a:r>
+          </a:p>
+          <a:p>
+            <a:r>
+              <a:rPr lang="pl-PL" sz="2400"/>
+              <a:t>Przy modyfikacji struktury danych np. usuwanie elementów, dodawanie, zamiana miejsc</a:t>
+            </a:r>
+            <a:endParaRPr lang="pl-PL"/>
+          </a:p>
+          <a:p>
+            <a:r>
+              <a:rPr lang="pl-PL" sz="2400"/>
+              <a:t>Kiedy danych jest mało</a:t>
+            </a:r>
+          </a:p>
+          <a:p>
+            <a:r>
+              <a:rPr lang="pl-PL" sz="2400"/>
+              <a:t>Niektóre biblioteki wymagają wprowadzania wszystkich danych na raz</a:t>
+            </a:r>
+            <a:endParaRPr lang="pl-PL" sz="2400" dirty="0"/>
+          </a:p>
+        </p:txBody>
+      </p:sp>
+    </p:spTree>
+    <p:extLst>
+      <p:ext uri="{BB962C8B-B14F-4D97-AF65-F5344CB8AC3E}">
+        <p14:creationId xmlns:p14="http://schemas.microsoft.com/office/powerpoint/2010/main" val="2177022678"/>
+      </p:ext>
+    </p:extLst>
+  </p:cSld>
+  <p:clrMapOvr>
+    <a:masterClrMapping/>
+  </p:clrMapOvr>
+</p:sld>
+</file>
+
+<file path=ppt/slides/slide21.xml><?xml version="1.0" encoding="utf-8"?>
+<p:sld xmlns:a="http://schemas.openxmlformats.org/drawingml/2006/main" xmlns:r="http://schemas.openxmlformats.org/officeDocument/2006/relationships" xmlns:p="http://schemas.openxmlformats.org/presentationml/2006/main">
+  <p:cSld>
+    <p:bg>
+      <p:bgPr>
+        <a:solidFill>
+          <a:schemeClr val="bg1"/>
+        </a:solidFill>
+        <a:effectLst/>
+      </p:bgPr>
+    </p:bg>
+    <p:spTree>
+      <p:nvGrpSpPr>
+        <p:cNvPr id="1" name="">
+          <a:extLst>
+            <a:ext uri="{FF2B5EF4-FFF2-40B4-BE49-F238E27FC236}">
+              <a16:creationId xmlns:a16="http://schemas.microsoft.com/office/drawing/2014/main" id="{D38CD710-E97C-77F6-B1FD-412E03600364}"/>
+            </a:ext>
+          </a:extLst>
+        </p:cNvPr>
+        <p:cNvGrpSpPr/>
+        <p:nvPr/>
+      </p:nvGrpSpPr>
+      <p:grpSpPr>
+        <a:xfrm>
+          <a:off x="0" y="0"/>
+          <a:ext cx="0" cy="0"/>
+          <a:chOff x="0" y="0"/>
+          <a:chExt cx="0" cy="0"/>
+        </a:xfrm>
+      </p:grpSpPr>
+      <p:sp useBgFill="1">
+        <p:nvSpPr>
+          <p:cNvPr id="8" name="Rectangle 7">
+            <a:extLst>
+              <a:ext uri="{FF2B5EF4-FFF2-40B4-BE49-F238E27FC236}">
+                <a16:creationId xmlns:a16="http://schemas.microsoft.com/office/drawing/2014/main" id="{B9362AFE-FBFA-4540-D25D-827D19075190}"/>
+              </a:ext>
+              <a:ext uri="{C183D7F6-B498-43B3-948B-1728B52AA6E4}">
+                <adec:decorative xmlns:adec="http://schemas.microsoft.com/office/drawing/2017/decorative" val="1"/>
+              </a:ext>
+            </a:extLst>
+          </p:cNvPr>
+          <p:cNvSpPr>
+            <a:spLocks noGrp="1" noRot="1" noChangeAspect="1" noMove="1" noResize="1" noEditPoints="1" noAdjustHandles="1" noChangeArrowheads="1" noChangeShapeType="1" noTextEdit="1"/>
+          </p:cNvSpPr>
+          <p:nvPr>
+            <p:extLst>
+              <p:ext uri="{386F3935-93C4-4BCD-93E2-E3B085C9AB24}">
+                <p16:designElem xmlns:p16="http://schemas.microsoft.com/office/powerpoint/2015/main" val="1"/>
+              </p:ext>
+            </p:extLst>
+          </p:nvPr>
+        </p:nvSpPr>
+        <p:spPr>
+          <a:xfrm>
+            <a:off x="0" y="0"/>
+            <a:ext cx="12192000" cy="6858000"/>
+          </a:xfrm>
+          <a:prstGeom prst="rect">
+            <a:avLst/>
+          </a:prstGeom>
+          <a:ln w="12700" cap="flat" cmpd="sng" algn="ctr">
+            <a:noFill/>
+            <a:prstDash val="solid"/>
+            <a:miter lim="800000"/>
+          </a:ln>
+          <a:effectLst/>
+          <a:extLst>
+            <a:ext uri="{91240B29-F687-4F45-9708-019B960494DF}">
+              <a14:hiddenLine xmlns:a14="http://schemas.microsoft.com/office/drawing/2010/main" w="12700" cap="flat" cmpd="sng" algn="ctr">
+                <a:solidFill>
+                  <a:schemeClr val="accent1">
+                    <a:shade val="50000"/>
+                  </a:schemeClr>
+                </a:solidFill>
+                <a:prstDash val="solid"/>
+                <a:miter lim="800000"/>
+              </a14:hiddenLine>
+            </a:ext>
+          </a:extLst>
+        </p:spPr>
+        <p:style>
+          <a:lnRef idx="2">
+            <a:schemeClr val="accent1">
+              <a:shade val="50000"/>
+            </a:schemeClr>
+          </a:lnRef>
+          <a:fillRef idx="1">
+            <a:schemeClr val="accent1"/>
+          </a:fillRef>
+          <a:effectRef idx="0">
+            <a:schemeClr val="accent1"/>
+          </a:effectRef>
+          <a:fontRef idx="minor">
+            <a:schemeClr val="lt1"/>
+          </a:fontRef>
+        </p:style>
+        <p:txBody>
+          <a:bodyPr rtlCol="0" anchor="ctr"/>
+          <a:lstStyle/>
+          <a:p>
+            <a:pPr algn="ctr"/>
+            <a:endParaRPr lang="en-US"/>
+          </a:p>
+        </p:txBody>
+      </p:sp>
+      <p:sp>
+        <p:nvSpPr>
+          <p:cNvPr id="10" name="Rectangle 9">
+            <a:extLst>
+              <a:ext uri="{FF2B5EF4-FFF2-40B4-BE49-F238E27FC236}">
+                <a16:creationId xmlns:a16="http://schemas.microsoft.com/office/drawing/2014/main" id="{E09C52AC-BA57-79AA-CBDF-8C153CC1A3BF}"/>
+              </a:ext>
+              <a:ext uri="{C183D7F6-B498-43B3-948B-1728B52AA6E4}">
+                <adec:decorative xmlns:adec="http://schemas.microsoft.com/office/drawing/2017/decorative" val="1"/>
+              </a:ext>
+            </a:extLst>
+          </p:cNvPr>
+          <p:cNvSpPr>
+            <a:spLocks noGrp="1" noRot="1" noChangeAspect="1" noMove="1" noResize="1" noEditPoints="1" noAdjustHandles="1" noChangeArrowheads="1" noChangeShapeType="1" noTextEdit="1"/>
+          </p:cNvSpPr>
+          <p:nvPr>
+            <p:extLst>
+              <p:ext uri="{386F3935-93C4-4BCD-93E2-E3B085C9AB24}">
+                <p16:designElem xmlns:p16="http://schemas.microsoft.com/office/powerpoint/2015/main" val="1"/>
+              </p:ext>
+            </p:extLst>
+          </p:nvPr>
+        </p:nvSpPr>
+        <p:spPr>
+          <a:xfrm flipH="1">
+            <a:off x="-1" y="-1"/>
+            <a:ext cx="12191998" cy="1590742"/>
+          </a:xfrm>
+          <a:prstGeom prst="rect">
+            <a:avLst/>
+          </a:prstGeom>
+          <a:gradFill>
+            <a:gsLst>
+              <a:gs pos="0">
+                <a:srgbClr val="000000"/>
+              </a:gs>
+              <a:gs pos="100000">
+                <a:schemeClr val="accent1">
+                  <a:lumMod val="75000"/>
+                </a:schemeClr>
+              </a:gs>
+            </a:gsLst>
+            <a:lin ang="8400000" scaled="0"/>
+          </a:gradFill>
+          <a:ln>
+            <a:noFill/>
+          </a:ln>
+        </p:spPr>
+        <p:style>
+          <a:lnRef idx="2">
+            <a:schemeClr val="accent1">
+              <a:shade val="50000"/>
+            </a:schemeClr>
+          </a:lnRef>
+          <a:fillRef idx="1">
+            <a:schemeClr val="accent1"/>
+          </a:fillRef>
+          <a:effectRef idx="0">
+            <a:schemeClr val="accent1"/>
+          </a:effectRef>
+          <a:fontRef idx="minor">
+            <a:schemeClr val="lt1"/>
+          </a:fontRef>
+        </p:style>
+        <p:txBody>
+          <a:bodyPr rtlCol="0" anchor="ctr"/>
+          <a:lstStyle/>
+          <a:p>
+            <a:pPr algn="ctr"/>
+            <a:endParaRPr lang="en-US"/>
+          </a:p>
+        </p:txBody>
+      </p:sp>
+      <p:sp>
+        <p:nvSpPr>
+          <p:cNvPr id="12" name="Rectangle 11">
+            <a:extLst>
+              <a:ext uri="{FF2B5EF4-FFF2-40B4-BE49-F238E27FC236}">
+                <a16:creationId xmlns:a16="http://schemas.microsoft.com/office/drawing/2014/main" id="{B510B602-E619-5A39-B1D4-7B1CD2DA284C}"/>
+              </a:ext>
+              <a:ext uri="{C183D7F6-B498-43B3-948B-1728B52AA6E4}">
+                <adec:decorative xmlns:adec="http://schemas.microsoft.com/office/drawing/2017/decorative" val="1"/>
+              </a:ext>
+            </a:extLst>
+          </p:cNvPr>
+          <p:cNvSpPr>
+            <a:spLocks noGrp="1" noRot="1" noChangeAspect="1" noMove="1" noResize="1" noEditPoints="1" noAdjustHandles="1" noChangeArrowheads="1" noChangeShapeType="1" noTextEdit="1"/>
+          </p:cNvSpPr>
+          <p:nvPr>
+            <p:extLst>
+              <p:ext uri="{386F3935-93C4-4BCD-93E2-E3B085C9AB24}">
+                <p16:designElem xmlns:p16="http://schemas.microsoft.com/office/powerpoint/2015/main" val="1"/>
+              </p:ext>
+            </p:extLst>
+          </p:nvPr>
+        </p:nvSpPr>
+        <p:spPr>
+          <a:xfrm rot="10800000" flipH="1">
+            <a:off x="-3" y="0"/>
+            <a:ext cx="8115306" cy="1590742"/>
+          </a:xfrm>
+          <a:prstGeom prst="rect">
+            <a:avLst/>
+          </a:prstGeom>
+          <a:gradFill>
+            <a:gsLst>
+              <a:gs pos="20000">
+                <a:schemeClr val="accent1">
+                  <a:alpha val="0"/>
+                </a:schemeClr>
+              </a:gs>
+              <a:gs pos="100000">
+                <a:schemeClr val="accent1">
+                  <a:lumMod val="50000"/>
+                  <a:alpha val="55000"/>
+                </a:schemeClr>
+              </a:gs>
+            </a:gsLst>
+            <a:lin ang="13800000" scaled="0"/>
+          </a:gradFill>
+          <a:ln>
+            <a:noFill/>
+          </a:ln>
+        </p:spPr>
+        <p:style>
+          <a:lnRef idx="2">
+            <a:schemeClr val="accent1">
+              <a:shade val="50000"/>
+            </a:schemeClr>
+          </a:lnRef>
+          <a:fillRef idx="1">
+            <a:schemeClr val="accent1"/>
+          </a:fillRef>
+          <a:effectRef idx="0">
+            <a:schemeClr val="accent1"/>
+          </a:effectRef>
+          <a:fontRef idx="minor">
+            <a:schemeClr val="lt1"/>
+          </a:fontRef>
+        </p:style>
+        <p:txBody>
+          <a:bodyPr rtlCol="0" anchor="ctr"/>
+          <a:lstStyle/>
+          <a:p>
+            <a:pPr algn="ctr"/>
+            <a:endParaRPr lang="en-US"/>
+          </a:p>
+        </p:txBody>
+      </p:sp>
+      <p:sp>
+        <p:nvSpPr>
+          <p:cNvPr id="14" name="Rectangle 13">
+            <a:extLst>
+              <a:ext uri="{FF2B5EF4-FFF2-40B4-BE49-F238E27FC236}">
+                <a16:creationId xmlns:a16="http://schemas.microsoft.com/office/drawing/2014/main" id="{BA78A61F-C434-8107-74FD-054693256DA3}"/>
+              </a:ext>
+              <a:ext uri="{C183D7F6-B498-43B3-948B-1728B52AA6E4}">
+                <adec:decorative xmlns:adec="http://schemas.microsoft.com/office/drawing/2017/decorative" val="1"/>
+              </a:ext>
+            </a:extLst>
+          </p:cNvPr>
+          <p:cNvSpPr>
+            <a:spLocks noGrp="1" noRot="1" noChangeAspect="1" noMove="1" noResize="1" noEditPoints="1" noAdjustHandles="1" noChangeArrowheads="1" noChangeShapeType="1" noTextEdit="1"/>
+          </p:cNvSpPr>
+          <p:nvPr>
+            <p:extLst>
+              <p:ext uri="{386F3935-93C4-4BCD-93E2-E3B085C9AB24}">
+                <p16:designElem xmlns:p16="http://schemas.microsoft.com/office/powerpoint/2015/main" val="1"/>
+              </p:ext>
+            </p:extLst>
+          </p:nvPr>
+        </p:nvSpPr>
+        <p:spPr>
+          <a:xfrm flipH="1">
+            <a:off x="8115299" y="-1"/>
+            <a:ext cx="4076698" cy="1590742"/>
+          </a:xfrm>
+          <a:prstGeom prst="rect">
+            <a:avLst/>
+          </a:prstGeom>
+          <a:gradFill>
+            <a:gsLst>
+              <a:gs pos="0">
+                <a:schemeClr val="accent1">
+                  <a:alpha val="66000"/>
+                </a:schemeClr>
+              </a:gs>
+              <a:gs pos="100000">
+                <a:srgbClr val="000000">
+                  <a:alpha val="30000"/>
+                </a:srgbClr>
+              </a:gs>
+            </a:gsLst>
+            <a:lin ang="13200000" scaled="0"/>
+          </a:gradFill>
+          <a:ln>
+            <a:noFill/>
+          </a:ln>
+        </p:spPr>
+        <p:style>
+          <a:lnRef idx="2">
+            <a:schemeClr val="accent1">
+              <a:shade val="50000"/>
+            </a:schemeClr>
+          </a:lnRef>
+          <a:fillRef idx="1">
+            <a:schemeClr val="accent1"/>
+          </a:fillRef>
+          <a:effectRef idx="0">
+            <a:schemeClr val="accent1"/>
+          </a:effectRef>
+          <a:fontRef idx="minor">
+            <a:schemeClr val="lt1"/>
+          </a:fontRef>
+        </p:style>
+        <p:txBody>
+          <a:bodyPr rtlCol="0" anchor="ctr"/>
+          <a:lstStyle/>
+          <a:p>
+            <a:pPr algn="ctr"/>
+            <a:endParaRPr lang="en-US"/>
+          </a:p>
+        </p:txBody>
+      </p:sp>
+      <p:sp>
+        <p:nvSpPr>
+          <p:cNvPr id="16" name="Rectangle 15">
+            <a:extLst>
+              <a:ext uri="{FF2B5EF4-FFF2-40B4-BE49-F238E27FC236}">
+                <a16:creationId xmlns:a16="http://schemas.microsoft.com/office/drawing/2014/main" id="{933484D1-41BC-7AC9-286E-EEB745A42F81}"/>
+              </a:ext>
+              <a:ext uri="{C183D7F6-B498-43B3-948B-1728B52AA6E4}">
+                <adec:decorative xmlns:adec="http://schemas.microsoft.com/office/drawing/2017/decorative" val="1"/>
+              </a:ext>
+            </a:extLst>
+          </p:cNvPr>
+          <p:cNvSpPr>
+            <a:spLocks noGrp="1" noRot="1" noChangeAspect="1" noMove="1" noResize="1" noEditPoints="1" noAdjustHandles="1" noChangeArrowheads="1" noChangeShapeType="1" noTextEdit="1"/>
+          </p:cNvSpPr>
+          <p:nvPr>
+            <p:extLst>
+              <p:ext uri="{386F3935-93C4-4BCD-93E2-E3B085C9AB24}">
+                <p16:designElem xmlns:p16="http://schemas.microsoft.com/office/powerpoint/2015/main" val="1"/>
+              </p:ext>
+            </p:extLst>
+          </p:nvPr>
+        </p:nvSpPr>
+        <p:spPr>
+          <a:xfrm>
+            <a:off x="459350" y="-1"/>
+            <a:ext cx="11732646" cy="1597433"/>
+          </a:xfrm>
+          <a:prstGeom prst="rect">
+            <a:avLst/>
+          </a:prstGeom>
+          <a:gradFill>
+            <a:gsLst>
+              <a:gs pos="50000">
+                <a:srgbClr val="000000">
+                  <a:alpha val="0"/>
+                </a:srgbClr>
+              </a:gs>
+              <a:gs pos="99000">
+                <a:schemeClr val="accent1">
+                  <a:lumMod val="50000"/>
+                  <a:alpha val="52000"/>
+                </a:schemeClr>
+              </a:gs>
+            </a:gsLst>
+            <a:lin ang="16800000" scaled="0"/>
+          </a:gradFill>
+          <a:ln>
+            <a:noFill/>
+          </a:ln>
+        </p:spPr>
+        <p:style>
+          <a:lnRef idx="2">
+            <a:schemeClr val="accent1">
+              <a:shade val="50000"/>
+            </a:schemeClr>
+          </a:lnRef>
+          <a:fillRef idx="1">
+            <a:schemeClr val="accent1"/>
+          </a:fillRef>
+          <a:effectRef idx="0">
+            <a:schemeClr val="accent1"/>
+          </a:effectRef>
+          <a:fontRef idx="minor">
+            <a:schemeClr val="lt1"/>
+          </a:fontRef>
+        </p:style>
+        <p:txBody>
+          <a:bodyPr rtlCol="0" anchor="ctr"/>
+          <a:lstStyle/>
+          <a:p>
+            <a:pPr algn="ctr"/>
+            <a:endParaRPr lang="en-US"/>
+          </a:p>
+        </p:txBody>
+      </p:sp>
+      <p:sp>
+        <p:nvSpPr>
+          <p:cNvPr id="2" name="Tytuł 1">
+            <a:extLst>
+              <a:ext uri="{FF2B5EF4-FFF2-40B4-BE49-F238E27FC236}">
+                <a16:creationId xmlns:a16="http://schemas.microsoft.com/office/drawing/2014/main" id="{50019646-DD9D-2C4F-A07A-4F2FDB72CEDC}"/>
+              </a:ext>
+            </a:extLst>
+          </p:cNvPr>
+          <p:cNvSpPr>
+            <a:spLocks noGrp="1"/>
+          </p:cNvSpPr>
+          <p:nvPr>
+            <p:ph type="title"/>
+          </p:nvPr>
+        </p:nvSpPr>
+        <p:spPr>
+          <a:xfrm>
+            <a:off x="1371599" y="294538"/>
+            <a:ext cx="9895951" cy="1033669"/>
+          </a:xfrm>
+        </p:spPr>
+        <p:txBody>
+          <a:bodyPr>
+            <a:normAutofit/>
+          </a:bodyPr>
+          <a:lstStyle/>
+          <a:p>
+            <a:r>
+              <a:rPr lang="pl-PL" sz="4000">
+                <a:solidFill>
+                  <a:srgbClr val="FFFFFF"/>
+                </a:solidFill>
+              </a:rPr>
+              <a:t>Bibliografia</a:t>
+            </a:r>
+          </a:p>
+        </p:txBody>
+      </p:sp>
+      <p:sp>
+        <p:nvSpPr>
+          <p:cNvPr id="3" name="Symbol zastępczy zawartości 2">
+            <a:extLst>
+              <a:ext uri="{FF2B5EF4-FFF2-40B4-BE49-F238E27FC236}">
+                <a16:creationId xmlns:a16="http://schemas.microsoft.com/office/drawing/2014/main" id="{43099CE8-0406-C87F-56DC-04DE4D25A9C9}"/>
+              </a:ext>
+            </a:extLst>
+          </p:cNvPr>
+          <p:cNvSpPr>
+            <a:spLocks noGrp="1"/>
+          </p:cNvSpPr>
+          <p:nvPr>
+            <p:ph idx="1"/>
+          </p:nvPr>
+        </p:nvSpPr>
+        <p:spPr>
+          <a:xfrm>
+            <a:off x="1371599" y="2318197"/>
+            <a:ext cx="9724031" cy="3683358"/>
+          </a:xfrm>
+        </p:spPr>
+        <p:txBody>
+          <a:bodyPr anchor="ctr">
+            <a:normAutofit/>
+          </a:bodyPr>
+          <a:lstStyle/>
+          <a:p>
+            <a:r>
+              <a:rPr lang="pl-PL" sz="2000" dirty="0">
+                <a:ea typeface="+mn-lt"/>
+                <a:cs typeface="+mn-lt"/>
+                <a:hlinkClick r:id="rId2"/>
+              </a:rPr>
+              <a:t>https://www.geeksforgeeks.org/python/iterators-in-python/</a:t>
+            </a:r>
+            <a:endParaRPr lang="pl-PL" sz="2000">
+              <a:ea typeface="+mn-lt"/>
+              <a:cs typeface="+mn-lt"/>
+            </a:endParaRPr>
+          </a:p>
+          <a:p>
+            <a:r>
+              <a:rPr lang="pl-PL" sz="2000" dirty="0">
+                <a:ea typeface="+mn-lt"/>
+                <a:cs typeface="+mn-lt"/>
+              </a:rPr>
+              <a:t>https://docs.python.org/3.14/tutorial/classes.html#iterators</a:t>
+            </a:r>
+            <a:endParaRPr lang="pl-PL" sz="2000" dirty="0"/>
+          </a:p>
+          <a:p>
+            <a:r>
+              <a:rPr lang="pl-PL" sz="2000"/>
+              <a:t>Real Python: Working With Python's Iterators, Iterables, and Iteration </a:t>
+            </a:r>
+            <a:r>
+              <a:rPr lang="pl-PL" sz="2000" dirty="0">
+                <a:hlinkClick r:id="rId3"/>
+              </a:rPr>
+              <a:t>https</a:t>
+            </a:r>
+            <a:r>
+              <a:rPr lang="pl-PL" sz="2000" dirty="0">
+                <a:ea typeface="+mn-lt"/>
+                <a:cs typeface="+mn-lt"/>
+                <a:hlinkClick r:id="rId3"/>
+              </a:rPr>
+              <a:t>://www.youtube.com/watch?v=DcCt0dA6q1Q</a:t>
+            </a:r>
+            <a:endParaRPr lang="en-US" sz="2000">
+              <a:ea typeface="+mn-lt"/>
+              <a:cs typeface="+mn-lt"/>
+            </a:endParaRPr>
+          </a:p>
+          <a:p>
+            <a:r>
+              <a:rPr lang="en-US" sz="2000" dirty="0"/>
+              <a:t>https://docs.python.org/3/library/itertools.html</a:t>
+            </a:r>
+            <a:br>
+              <a:rPr lang="en-US" sz="2000" dirty="0"/>
+            </a:br>
+            <a:endParaRPr lang="en-US" sz="2000" dirty="0"/>
+          </a:p>
+        </p:txBody>
+      </p:sp>
+    </p:spTree>
+    <p:extLst>
+      <p:ext uri="{BB962C8B-B14F-4D97-AF65-F5344CB8AC3E}">
+        <p14:creationId xmlns:p14="http://schemas.microsoft.com/office/powerpoint/2010/main" val="4075901508"/>
       </p:ext>
     </p:extLst>
   </p:cSld>

--- a/Generatory i Iteratory.pptx
+++ b/Generatory i Iteratory.pptx
@@ -23,8 +23,8 @@
     <p:sldId id="278" r:id="rId17"/>
     <p:sldId id="280" r:id="rId18"/>
     <p:sldId id="257" r:id="rId19"/>
-    <p:sldId id="282" r:id="rId20"/>
-    <p:sldId id="281" r:id="rId21"/>
+    <p:sldId id="281" r:id="rId20"/>
+    <p:sldId id="282" r:id="rId21"/>
     <p:sldId id="262" r:id="rId22"/>
   </p:sldIdLst>
   <p:sldSz cx="12192000" cy="6858000"/>
@@ -135,8 +135,7 @@
 <file path=ppt/revisionInfo.xml><?xml version="1.0" encoding="utf-8"?>
 <p1510:revInfo xmlns:a="http://schemas.openxmlformats.org/drawingml/2006/main" xmlns:r="http://schemas.openxmlformats.org/officeDocument/2006/relationships" xmlns:p1510="http://schemas.microsoft.com/office/powerpoint/2015/10/main">
   <p1510:revLst>
-    <p1510:client id="{BC397A5D-2CE8-0676-56DF-EA9CE18C6EA7}" v="1531" dt="2026-03-28T17:14:22.652"/>
-    <p1510:client id="{F678D1BB-E81B-AFD1-CE0B-65F9C28A6CC5}" v="283" dt="2026-03-30T14:37:59.170"/>
+    <p1510:client id="{02D8E16E-426D-BACB-E46A-CFD46F0AFCD1}" v="46" dt="2026-04-07T18:39:47.743"/>
   </p1510:revLst>
 </p1510:revInfo>
 </file>
@@ -270,7 +269,7 @@
           <a:p>
             <a:fld id="{F98AA868-8872-43E4-8C98-D34DABD1FD38}" type="datetimeFigureOut">
               <a:rPr lang="pl-PL" smtClean="0"/>
-              <a:t>30.03.2026</a:t>
+              <a:t>07.04.2026</a:t>
             </a:fld>
             <a:endParaRPr lang="pl-PL"/>
           </a:p>
@@ -438,7 +437,7 @@
           <a:p>
             <a:fld id="{F98AA868-8872-43E4-8C98-D34DABD1FD38}" type="datetimeFigureOut">
               <a:rPr lang="pl-PL" smtClean="0"/>
-              <a:t>30.03.2026</a:t>
+              <a:t>07.04.2026</a:t>
             </a:fld>
             <a:endParaRPr lang="pl-PL"/>
           </a:p>
@@ -616,7 +615,7 @@
           <a:p>
             <a:fld id="{F98AA868-8872-43E4-8C98-D34DABD1FD38}" type="datetimeFigureOut">
               <a:rPr lang="pl-PL" smtClean="0"/>
-              <a:t>30.03.2026</a:t>
+              <a:t>07.04.2026</a:t>
             </a:fld>
             <a:endParaRPr lang="pl-PL"/>
           </a:p>
@@ -784,7 +783,7 @@
           <a:p>
             <a:fld id="{F98AA868-8872-43E4-8C98-D34DABD1FD38}" type="datetimeFigureOut">
               <a:rPr lang="pl-PL" smtClean="0"/>
-              <a:t>30.03.2026</a:t>
+              <a:t>07.04.2026</a:t>
             </a:fld>
             <a:endParaRPr lang="pl-PL"/>
           </a:p>
@@ -1029,7 +1028,7 @@
           <a:p>
             <a:fld id="{F98AA868-8872-43E4-8C98-D34DABD1FD38}" type="datetimeFigureOut">
               <a:rPr lang="pl-PL" smtClean="0"/>
-              <a:t>30.03.2026</a:t>
+              <a:t>07.04.2026</a:t>
             </a:fld>
             <a:endParaRPr lang="pl-PL"/>
           </a:p>
@@ -1258,7 +1257,7 @@
           <a:p>
             <a:fld id="{F98AA868-8872-43E4-8C98-D34DABD1FD38}" type="datetimeFigureOut">
               <a:rPr lang="pl-PL" smtClean="0"/>
-              <a:t>30.03.2026</a:t>
+              <a:t>07.04.2026</a:t>
             </a:fld>
             <a:endParaRPr lang="pl-PL"/>
           </a:p>
@@ -1622,7 +1621,7 @@
           <a:p>
             <a:fld id="{F98AA868-8872-43E4-8C98-D34DABD1FD38}" type="datetimeFigureOut">
               <a:rPr lang="pl-PL" smtClean="0"/>
-              <a:t>30.03.2026</a:t>
+              <a:t>07.04.2026</a:t>
             </a:fld>
             <a:endParaRPr lang="pl-PL"/>
           </a:p>
@@ -1739,7 +1738,7 @@
           <a:p>
             <a:fld id="{F98AA868-8872-43E4-8C98-D34DABD1FD38}" type="datetimeFigureOut">
               <a:rPr lang="pl-PL" smtClean="0"/>
-              <a:t>30.03.2026</a:t>
+              <a:t>07.04.2026</a:t>
             </a:fld>
             <a:endParaRPr lang="pl-PL"/>
           </a:p>
@@ -1834,7 +1833,7 @@
           <a:p>
             <a:fld id="{F98AA868-8872-43E4-8C98-D34DABD1FD38}" type="datetimeFigureOut">
               <a:rPr lang="pl-PL" smtClean="0"/>
-              <a:t>30.03.2026</a:t>
+              <a:t>07.04.2026</a:t>
             </a:fld>
             <a:endParaRPr lang="pl-PL"/>
           </a:p>
@@ -2109,7 +2108,7 @@
           <a:p>
             <a:fld id="{F98AA868-8872-43E4-8C98-D34DABD1FD38}" type="datetimeFigureOut">
               <a:rPr lang="pl-PL" smtClean="0"/>
-              <a:t>30.03.2026</a:t>
+              <a:t>07.04.2026</a:t>
             </a:fld>
             <a:endParaRPr lang="pl-PL"/>
           </a:p>
@@ -2361,7 +2360,7 @@
           <a:p>
             <a:fld id="{F98AA868-8872-43E4-8C98-D34DABD1FD38}" type="datetimeFigureOut">
               <a:rPr lang="pl-PL" smtClean="0"/>
-              <a:t>30.03.2026</a:t>
+              <a:t>07.04.2026</a:t>
             </a:fld>
             <a:endParaRPr lang="pl-PL"/>
           </a:p>
@@ -2572,7 +2571,7 @@
           <a:p>
             <a:fld id="{F98AA868-8872-43E4-8C98-D34DABD1FD38}" type="datetimeFigureOut">
               <a:rPr lang="pl-PL" smtClean="0"/>
-              <a:t>30.03.2026</a:t>
+              <a:t>07.04.2026</a:t>
             </a:fld>
             <a:endParaRPr lang="pl-PL"/>
           </a:p>
@@ -9785,7 +9784,7 @@
         <p:cNvPr id="1" name="">
           <a:extLst>
             <a:ext uri="{FF2B5EF4-FFF2-40B4-BE49-F238E27FC236}">
-              <a16:creationId xmlns:a16="http://schemas.microsoft.com/office/drawing/2014/main" id="{E52604EE-A6E1-E513-8107-614B3D3E8ECF}"/>
+              <a16:creationId xmlns:a16="http://schemas.microsoft.com/office/drawing/2014/main" id="{5BD0DCC1-0FB1-1FDC-F3EE-0AF0544048F6}"/>
             </a:ext>
           </a:extLst>
         </p:cNvPr>
@@ -9805,7 +9804,7 @@
           <p:cNvPr id="8" name="Rectangle 7">
             <a:extLst>
               <a:ext uri="{FF2B5EF4-FFF2-40B4-BE49-F238E27FC236}">
-                <a16:creationId xmlns:a16="http://schemas.microsoft.com/office/drawing/2014/main" id="{30F47A60-4565-8CCA-1191-C9158B2D5055}"/>
+                <a16:creationId xmlns:a16="http://schemas.microsoft.com/office/drawing/2014/main" id="{FDD7DFE9-7947-7988-7E75-FE39AD6BAC13}"/>
               </a:ext>
               <a:ext uri="{C183D7F6-B498-43B3-948B-1728B52AA6E4}">
                 <adec:decorative xmlns:adec="http://schemas.microsoft.com/office/drawing/2017/decorative" val="1"/>
@@ -9881,7 +9880,7 @@
           <p:cNvPr id="10" name="Rectangle 9">
             <a:extLst>
               <a:ext uri="{FF2B5EF4-FFF2-40B4-BE49-F238E27FC236}">
-                <a16:creationId xmlns:a16="http://schemas.microsoft.com/office/drawing/2014/main" id="{EF9CBB8F-C512-5098-98AC-843664B199C5}"/>
+                <a16:creationId xmlns:a16="http://schemas.microsoft.com/office/drawing/2014/main" id="{1A686574-5DE6-3613-BF92-5D7C3BD2A144}"/>
               </a:ext>
               <a:ext uri="{C183D7F6-B498-43B3-948B-1728B52AA6E4}">
                 <adec:decorative xmlns:adec="http://schemas.microsoft.com/office/drawing/2017/decorative" val="1"/>
@@ -9954,7 +9953,7 @@
           <p:cNvPr id="12" name="Rectangle 11">
             <a:extLst>
               <a:ext uri="{FF2B5EF4-FFF2-40B4-BE49-F238E27FC236}">
-                <a16:creationId xmlns:a16="http://schemas.microsoft.com/office/drawing/2014/main" id="{0C69B559-C559-D9BB-B4C1-C8631B13B327}"/>
+                <a16:creationId xmlns:a16="http://schemas.microsoft.com/office/drawing/2014/main" id="{3C7A83C6-B1FB-D1C2-E54E-95BB52F5660B}"/>
               </a:ext>
               <a:ext uri="{C183D7F6-B498-43B3-948B-1728B52AA6E4}">
                 <adec:decorative xmlns:adec="http://schemas.microsoft.com/office/drawing/2017/decorative" val="1"/>
@@ -10030,7 +10029,7 @@
           <p:cNvPr id="14" name="Rectangle 13">
             <a:extLst>
               <a:ext uri="{FF2B5EF4-FFF2-40B4-BE49-F238E27FC236}">
-                <a16:creationId xmlns:a16="http://schemas.microsoft.com/office/drawing/2014/main" id="{683746C8-A085-2ACF-7ACF-866FC8B283A1}"/>
+                <a16:creationId xmlns:a16="http://schemas.microsoft.com/office/drawing/2014/main" id="{213A345D-B6CA-2A6F-FC1C-9F72F7DE48E0}"/>
               </a:ext>
               <a:ext uri="{C183D7F6-B498-43B3-948B-1728B52AA6E4}">
                 <adec:decorative xmlns:adec="http://schemas.microsoft.com/office/drawing/2017/decorative" val="1"/>
@@ -10105,7 +10104,7 @@
           <p:cNvPr id="16" name="Rectangle 15">
             <a:extLst>
               <a:ext uri="{FF2B5EF4-FFF2-40B4-BE49-F238E27FC236}">
-                <a16:creationId xmlns:a16="http://schemas.microsoft.com/office/drawing/2014/main" id="{FBE185FC-5C6F-0771-AD8C-7CE84403CEE9}"/>
+                <a16:creationId xmlns:a16="http://schemas.microsoft.com/office/drawing/2014/main" id="{5E7634DF-9E76-C165-665F-C7F8F30AC66D}"/>
               </a:ext>
               <a:ext uri="{C183D7F6-B498-43B3-948B-1728B52AA6E4}">
                 <adec:decorative xmlns:adec="http://schemas.microsoft.com/office/drawing/2017/decorative" val="1"/>
@@ -10181,7 +10180,7 @@
           <p:cNvPr id="2" name="Tytuł 1">
             <a:extLst>
               <a:ext uri="{FF2B5EF4-FFF2-40B4-BE49-F238E27FC236}">
-                <a16:creationId xmlns:a16="http://schemas.microsoft.com/office/drawing/2014/main" id="{C88A3693-FE4E-2488-5411-68649EF801AA}"/>
+                <a16:creationId xmlns:a16="http://schemas.microsoft.com/office/drawing/2014/main" id="{A0FAB327-D224-3E2E-B4A6-B206E9A55D02}"/>
               </a:ext>
             </a:extLst>
           </p:cNvPr>
@@ -10210,9 +10209,13 @@
                   <a:srgbClr val="FFFFFF"/>
                 </a:solidFill>
               </a:rPr>
-              <a:t>Kiedy używać iteratorów i generatorów</a:t>
+              <a:t>Czy listy są bez sensu? NIE!</a:t>
             </a:r>
-            <a:endParaRPr lang="pl-PL"/>
+            <a:endParaRPr lang="pl-PL" sz="4000" dirty="0">
+              <a:solidFill>
+                <a:srgbClr val="FFFFFF"/>
+              </a:solidFill>
+            </a:endParaRPr>
           </a:p>
         </p:txBody>
       </p:sp>
@@ -10221,7 +10224,7 @@
           <p:cNvPr id="5" name="Symbol zastępczy zawartości 4">
             <a:extLst>
               <a:ext uri="{FF2B5EF4-FFF2-40B4-BE49-F238E27FC236}">
-                <a16:creationId xmlns:a16="http://schemas.microsoft.com/office/drawing/2014/main" id="{15F0D6B0-FAB0-8A83-E260-B95734CB32EE}"/>
+                <a16:creationId xmlns:a16="http://schemas.microsoft.com/office/drawing/2014/main" id="{39188AA7-66F1-2D92-60F7-160598BA9257}"/>
               </a:ext>
             </a:extLst>
           </p:cNvPr>
@@ -10234,7 +10237,7 @@
         </p:nvSpPr>
         <p:spPr>
           <a:xfrm>
-            <a:off x="760046" y="1986817"/>
+            <a:off x="760046" y="1923317"/>
             <a:ext cx="10515600" cy="4351338"/>
           </a:xfrm>
         </p:spPr>
@@ -10244,45 +10247,46 @@
           </a:bodyPr>
           <a:lstStyle/>
           <a:p>
+            <a:pPr marL="0" indent="0">
+              <a:buNone/>
+            </a:pPr>
             <a:r>
-              <a:rPr lang="pl-PL"/>
-              <a:t>Przy pracy na ogromnych zbiorach danych</a:t>
+              <a:rPr lang="pl-PL" sz="3200" b="1"/>
+              <a:t>Kiedy używać list:</a:t>
             </a:r>
-            <a:endParaRPr lang="pl-PL" dirty="0"/>
           </a:p>
           <a:p>
             <a:r>
-              <a:rPr lang="pl-PL"/>
-              <a:t>Do generowania nieskończonych ciągów danych</a:t>
+              <a:rPr lang="pl-PL" sz="2400"/>
+              <a:t>Gdy potrzebujemy dostępu do konkretnego elementu np. liczby[4]</a:t>
             </a:r>
-            <a:endParaRPr lang="pl-PL" dirty="0"/>
           </a:p>
           <a:p>
             <a:r>
-              <a:rPr lang="pl-PL"/>
-              <a:t>Gdy nie potrzebujemy dostępu do wszystkich danych naraz</a:t>
+              <a:rPr lang="pl-PL" sz="2400"/>
+              <a:t>Przy modyfikacji struktury danych np. usuwanie elementów, dodawanie, zamiana miejsc</a:t>
             </a:r>
-            <a:endParaRPr lang="pl-PL" dirty="0"/>
+            <a:endParaRPr lang="pl-PL"/>
           </a:p>
           <a:p>
             <a:r>
-              <a:rPr lang="pl-PL"/>
-              <a:t>Do tworzenia potoków danych</a:t>
+              <a:rPr lang="pl-PL" sz="2400"/>
+              <a:t>Kiedy danych jest mało</a:t>
             </a:r>
-            <a:endParaRPr lang="pl-PL" dirty="0"/>
-          </a:p>
-          <a:p>
-            <a:endParaRPr lang="pl-PL" dirty="0"/>
-          </a:p>
-          <a:p>
-            <a:endParaRPr lang="pl-PL" dirty="0"/>
+          </a:p>
+          <a:p>
+            <a:r>
+              <a:rPr lang="pl-PL" sz="2400"/>
+              <a:t>Niektóre biblioteki wymagają wprowadzania wszystkich danych na raz</a:t>
+            </a:r>
+            <a:endParaRPr lang="pl-PL" sz="2400" dirty="0"/>
           </a:p>
         </p:txBody>
       </p:sp>
     </p:spTree>
     <p:extLst>
       <p:ext uri="{BB962C8B-B14F-4D97-AF65-F5344CB8AC3E}">
-        <p14:creationId xmlns:p14="http://schemas.microsoft.com/office/powerpoint/2010/main" val="1057566769"/>
+        <p14:creationId xmlns:p14="http://schemas.microsoft.com/office/powerpoint/2010/main" val="2177022678"/>
       </p:ext>
     </p:extLst>
   </p:cSld>
@@ -10815,7 +10819,7 @@
         <p:cNvPr id="1" name="">
           <a:extLst>
             <a:ext uri="{FF2B5EF4-FFF2-40B4-BE49-F238E27FC236}">
-              <a16:creationId xmlns:a16="http://schemas.microsoft.com/office/drawing/2014/main" id="{5BD0DCC1-0FB1-1FDC-F3EE-0AF0544048F6}"/>
+              <a16:creationId xmlns:a16="http://schemas.microsoft.com/office/drawing/2014/main" id="{E52604EE-A6E1-E513-8107-614B3D3E8ECF}"/>
             </a:ext>
           </a:extLst>
         </p:cNvPr>
@@ -10835,7 +10839,7 @@
           <p:cNvPr id="8" name="Rectangle 7">
             <a:extLst>
               <a:ext uri="{FF2B5EF4-FFF2-40B4-BE49-F238E27FC236}">
-                <a16:creationId xmlns:a16="http://schemas.microsoft.com/office/drawing/2014/main" id="{FDD7DFE9-7947-7988-7E75-FE39AD6BAC13}"/>
+                <a16:creationId xmlns:a16="http://schemas.microsoft.com/office/drawing/2014/main" id="{30F47A60-4565-8CCA-1191-C9158B2D5055}"/>
               </a:ext>
               <a:ext uri="{C183D7F6-B498-43B3-948B-1728B52AA6E4}">
                 <adec:decorative xmlns:adec="http://schemas.microsoft.com/office/drawing/2017/decorative" val="1"/>
@@ -10911,7 +10915,7 @@
           <p:cNvPr id="10" name="Rectangle 9">
             <a:extLst>
               <a:ext uri="{FF2B5EF4-FFF2-40B4-BE49-F238E27FC236}">
-                <a16:creationId xmlns:a16="http://schemas.microsoft.com/office/drawing/2014/main" id="{1A686574-5DE6-3613-BF92-5D7C3BD2A144}"/>
+                <a16:creationId xmlns:a16="http://schemas.microsoft.com/office/drawing/2014/main" id="{EF9CBB8F-C512-5098-98AC-843664B199C5}"/>
               </a:ext>
               <a:ext uri="{C183D7F6-B498-43B3-948B-1728B52AA6E4}">
                 <adec:decorative xmlns:adec="http://schemas.microsoft.com/office/drawing/2017/decorative" val="1"/>
@@ -10984,7 +10988,7 @@
           <p:cNvPr id="12" name="Rectangle 11">
             <a:extLst>
               <a:ext uri="{FF2B5EF4-FFF2-40B4-BE49-F238E27FC236}">
-                <a16:creationId xmlns:a16="http://schemas.microsoft.com/office/drawing/2014/main" id="{3C7A83C6-B1FB-D1C2-E54E-95BB52F5660B}"/>
+                <a16:creationId xmlns:a16="http://schemas.microsoft.com/office/drawing/2014/main" id="{0C69B559-C559-D9BB-B4C1-C8631B13B327}"/>
               </a:ext>
               <a:ext uri="{C183D7F6-B498-43B3-948B-1728B52AA6E4}">
                 <adec:decorative xmlns:adec="http://schemas.microsoft.com/office/drawing/2017/decorative" val="1"/>
@@ -11060,7 +11064,7 @@
           <p:cNvPr id="14" name="Rectangle 13">
             <a:extLst>
               <a:ext uri="{FF2B5EF4-FFF2-40B4-BE49-F238E27FC236}">
-                <a16:creationId xmlns:a16="http://schemas.microsoft.com/office/drawing/2014/main" id="{213A345D-B6CA-2A6F-FC1C-9F72F7DE48E0}"/>
+                <a16:creationId xmlns:a16="http://schemas.microsoft.com/office/drawing/2014/main" id="{683746C8-A085-2ACF-7ACF-866FC8B283A1}"/>
               </a:ext>
               <a:ext uri="{C183D7F6-B498-43B3-948B-1728B52AA6E4}">
                 <adec:decorative xmlns:adec="http://schemas.microsoft.com/office/drawing/2017/decorative" val="1"/>
@@ -11135,7 +11139,7 @@
           <p:cNvPr id="16" name="Rectangle 15">
             <a:extLst>
               <a:ext uri="{FF2B5EF4-FFF2-40B4-BE49-F238E27FC236}">
-                <a16:creationId xmlns:a16="http://schemas.microsoft.com/office/drawing/2014/main" id="{5E7634DF-9E76-C165-665F-C7F8F30AC66D}"/>
+                <a16:creationId xmlns:a16="http://schemas.microsoft.com/office/drawing/2014/main" id="{FBE185FC-5C6F-0771-AD8C-7CE84403CEE9}"/>
               </a:ext>
               <a:ext uri="{C183D7F6-B498-43B3-948B-1728B52AA6E4}">
                 <adec:decorative xmlns:adec="http://schemas.microsoft.com/office/drawing/2017/decorative" val="1"/>
@@ -11211,7 +11215,7 @@
           <p:cNvPr id="2" name="Tytuł 1">
             <a:extLst>
               <a:ext uri="{FF2B5EF4-FFF2-40B4-BE49-F238E27FC236}">
-                <a16:creationId xmlns:a16="http://schemas.microsoft.com/office/drawing/2014/main" id="{A0FAB327-D224-3E2E-B4A6-B206E9A55D02}"/>
+                <a16:creationId xmlns:a16="http://schemas.microsoft.com/office/drawing/2014/main" id="{C88A3693-FE4E-2488-5411-68649EF801AA}"/>
               </a:ext>
             </a:extLst>
           </p:cNvPr>
@@ -11240,13 +11244,9 @@
                   <a:srgbClr val="FFFFFF"/>
                 </a:solidFill>
               </a:rPr>
-              <a:t>Czy listy są bez sensu? NIE!</a:t>
+              <a:t>Kiedy używać iteratorów i generatorów</a:t>
             </a:r>
-            <a:endParaRPr lang="pl-PL" sz="4000" dirty="0">
-              <a:solidFill>
-                <a:srgbClr val="FFFFFF"/>
-              </a:solidFill>
-            </a:endParaRPr>
+            <a:endParaRPr lang="pl-PL"/>
           </a:p>
         </p:txBody>
       </p:sp>
@@ -11255,7 +11255,7 @@
           <p:cNvPr id="5" name="Symbol zastępczy zawartości 4">
             <a:extLst>
               <a:ext uri="{FF2B5EF4-FFF2-40B4-BE49-F238E27FC236}">
-                <a16:creationId xmlns:a16="http://schemas.microsoft.com/office/drawing/2014/main" id="{39188AA7-66F1-2D92-60F7-160598BA9257}"/>
+                <a16:creationId xmlns:a16="http://schemas.microsoft.com/office/drawing/2014/main" id="{15F0D6B0-FAB0-8A83-E260-B95734CB32EE}"/>
               </a:ext>
             </a:extLst>
           </p:cNvPr>
@@ -11268,7 +11268,7 @@
         </p:nvSpPr>
         <p:spPr>
           <a:xfrm>
-            <a:off x="760046" y="1923317"/>
+            <a:off x="760046" y="1986817"/>
             <a:ext cx="10515600" cy="4351338"/>
           </a:xfrm>
         </p:spPr>
@@ -11278,46 +11278,45 @@
           </a:bodyPr>
           <a:lstStyle/>
           <a:p>
-            <a:pPr marL="0" indent="0">
-              <a:buNone/>
-            </a:pPr>
             <a:r>
-              <a:rPr lang="pl-PL" sz="3200" b="1"/>
-              <a:t>Kiedy używać list:</a:t>
+              <a:rPr lang="pl-PL"/>
+              <a:t>Przy pracy na ogromnych zbiorach danych</a:t>
             </a:r>
+            <a:endParaRPr lang="pl-PL" dirty="0"/>
           </a:p>
           <a:p>
             <a:r>
-              <a:rPr lang="pl-PL" sz="2400"/>
-              <a:t>Gdy potrzebujemy dostępu do konkretnego elementu np. liczby[4]</a:t>
+              <a:rPr lang="pl-PL"/>
+              <a:t>Do generowania nieskończonych ciągów danych</a:t>
             </a:r>
+            <a:endParaRPr lang="pl-PL" dirty="0"/>
           </a:p>
           <a:p>
             <a:r>
-              <a:rPr lang="pl-PL" sz="2400"/>
-              <a:t>Przy modyfikacji struktury danych np. usuwanie elementów, dodawanie, zamiana miejsc</a:t>
+              <a:rPr lang="pl-PL"/>
+              <a:t>Gdy nie potrzebujemy dostępu do wszystkich danych naraz</a:t>
             </a:r>
-            <a:endParaRPr lang="pl-PL"/>
+            <a:endParaRPr lang="pl-PL" dirty="0"/>
           </a:p>
           <a:p>
             <a:r>
-              <a:rPr lang="pl-PL" sz="2400"/>
-              <a:t>Kiedy danych jest mało</a:t>
+              <a:rPr lang="pl-PL"/>
+              <a:t>Do tworzenia potoków danych</a:t>
             </a:r>
-          </a:p>
-          <a:p>
-            <a:r>
-              <a:rPr lang="pl-PL" sz="2400"/>
-              <a:t>Niektóre biblioteki wymagają wprowadzania wszystkich danych na raz</a:t>
-            </a:r>
-            <a:endParaRPr lang="pl-PL" sz="2400" dirty="0"/>
+            <a:endParaRPr lang="pl-PL" dirty="0"/>
+          </a:p>
+          <a:p>
+            <a:endParaRPr lang="pl-PL" dirty="0"/>
+          </a:p>
+          <a:p>
+            <a:endParaRPr lang="pl-PL" dirty="0"/>
           </a:p>
         </p:txBody>
       </p:sp>
     </p:spTree>
     <p:extLst>
       <p:ext uri="{BB962C8B-B14F-4D97-AF65-F5344CB8AC3E}">
-        <p14:creationId xmlns:p14="http://schemas.microsoft.com/office/powerpoint/2010/main" val="2177022678"/>
+        <p14:creationId xmlns:p14="http://schemas.microsoft.com/office/powerpoint/2010/main" val="1057566769"/>
       </p:ext>
     </p:extLst>
   </p:cSld>
@@ -14783,7 +14782,7 @@
         </p:nvSpPr>
         <p:spPr>
           <a:xfrm>
-            <a:off x="1371599" y="1716618"/>
+            <a:off x="1371599" y="2092795"/>
             <a:ext cx="3855295" cy="3683358"/>
           </a:xfrm>
         </p:spPr>
@@ -14796,14 +14795,14 @@
             <a:pPr marL="342900" indent="-342900"/>
             <a:r>
               <a:rPr lang="pl-PL"/>
-              <a:t>Zwraca samą siebie</a:t>
+              <a:t>Zwraca iterator z danego obiektu</a:t>
             </a:r>
           </a:p>
           <a:p>
             <a:pPr marL="342900" indent="-342900"/>
             <a:r>
               <a:rPr lang="pl-PL"/>
-              <a:t>Informuje pętle for że obiekt jest iteratorem</a:t>
+              <a:t>Gdy obiekt jest iteratorem zwraca samego siebie</a:t>
             </a:r>
           </a:p>
         </p:txBody>
